--- a/gallery/pptx/fixtures/32-unmodelled-content.pptx
+++ b/gallery/pptx/fixtures/32-unmodelled-content.pptx
@@ -10,6 +10,28 @@
   <p:sldSz cx="9144000" cy="6858000"/>
   <p:notesSz cx="6858000" cy="9144000"/>
 </p:presentation>
+</file>
+
+<file path=ppt/diagrams/colors1.xml><?xml version="1.0" encoding="utf-8"?>
+<dgm:colorsDef xmlns:dgm="http://schemas.openxmlformats.org/drawingml/2006/diagram"/>
+</file>
+
+<file path=ppt/diagrams/data1.xml><?xml version="1.0" encoding="utf-8"?>
+<dgm:dataModel xmlns:dgm="http://schemas.openxmlformats.org/drawingml/2006/diagram">
+  <dgm:ptLst/>
+</dgm:dataModel>
+</file>
+
+<file path=ppt/diagrams/layout1.xml><?xml version="1.0" encoding="utf-8"?>
+<dgm:layoutDef xmlns:dgm="http://schemas.openxmlformats.org/drawingml/2006/diagram"/>
+</file>
+
+<file path=ppt/diagrams/quickStyle1.xml><?xml version="1.0" encoding="utf-8"?>
+<dgm:styleDef xmlns:dgm="http://schemas.openxmlformats.org/drawingml/2006/diagram"/>
+</file>
+
+<file path=ppt/ink/ink1.xml><?xml version="1.0" encoding="utf-8"?>
+<inkml:ink xmlns:inkml="http://www.w3.org/2003/InkML"/>
 </file>
 
 <file path=ppt/slideLayouts/slideLayout1.xml><?xml version="1.0" encoding="utf-8"?>
@@ -202,6 +224,14 @@
   <p:clrMapOvr>
     <a:masterClrMapping/>
   </p:clrMapOvr>
+  <p:transition spd="med">
+    <p:fade/>
+  </p:transition>
+  <p:extLst>
+    <p:ext uri="{DEADBEEF-0000-4000-8000-000000000001}">
+      <p14:creationId xmlns:p14="http://schemas.microsoft.com/office/powerpoint/2010/main" val="7654321"/>
+    </p:ext>
+  </p:extLst>
 </p:sld>
 </file>
 
